--- a/web/static/files/ICAS-Call-for-Papers.pptx
+++ b/web/static/files/ICAS-Call-for-Papers.pptx
@@ -3375,7 +3375,7 @@
                 <a:latin typeface="jf open 粉圓 2.0" panose="020B0000000000000000" pitchFamily="34" charset="-120"/>
                 <a:ea typeface="jf open 粉圓 2.0" panose="020B0000000000000000" pitchFamily="34" charset="-120"/>
               </a:rPr>
-              <a:t>on Autonomous System, ICAS</a:t>
+              <a:t>on Autonomous Systems, ICAS</a:t>
             </a:r>
             <a:br>
               <a:rPr lang="en-US" altLang="zh-TW" dirty="0">
@@ -4374,7 +4374,7 @@
         </p:spPr>
         <p:txBody>
           <a:bodyPr>
-            <a:normAutofit fontScale="32500" lnSpcReduction="20000"/>
+            <a:normAutofit fontScale="30000" lnSpcReduction="20000"/>
           </a:bodyPr>
           <a:lstStyle/>
           <a:p>
@@ -4408,7 +4408,24 @@
                 <a:latin typeface="jf open 粉圓 2.0" panose="020B0000000000000000" pitchFamily="34" charset="-120"/>
                 <a:ea typeface="jf open 粉圓 2.0" panose="020B0000000000000000" pitchFamily="34" charset="-120"/>
               </a:rPr>
-              <a:t>: self-driving cars, UAVs, unmanned surface and underwater vehicles, space autonomy.</a:t>
+              <a:t>: self-driving cars, unmanned ground, surface and underwater vehicles, space autonomy.</a:t>
+            </a:r>
+          </a:p>
+          <a:p>
+            <a:pPr lvl="0"/>
+            <a:r>
+              <a:rPr lang="zh-TW" altLang="zh-TW" sz="4000" b="1" dirty="0">
+                <a:latin typeface="jf open 粉圓 2.0" panose="020B0000000000000000" pitchFamily="34" charset="-120"/>
+                <a:ea typeface="jf open 粉圓 2.0" panose="020B0000000000000000" pitchFamily="34" charset="-120"/>
+              </a:rPr>
+              <a:t>Drones and Aerial Autonomy</a:t>
+            </a:r>
+            <a:r>
+              <a:rPr lang="zh-TW" altLang="zh-TW" sz="4000" dirty="0">
+                <a:latin typeface="jf open 粉圓 2.0" panose="020B0000000000000000" pitchFamily="34" charset="-120"/>
+                <a:ea typeface="jf open 粉圓 2.0" panose="020B0000000000000000" pitchFamily="34" charset="-120"/>
+              </a:rPr>
+              <a:t>: multirotor and fixed-wing UAVs, autonomous flight control, aerial mapping and inspection, drone swarms, beyond-visual-line-of-sight operations.</a:t>
             </a:r>
           </a:p>
           <a:p>
